--- a/public/fun/cards/life/life-09.pptx
+++ b/public/fun/cards/life/life-09.pptx
@@ -3085,7 +3085,7 @@
     <p:bg>
       <p:bgPr>
         <a:solidFill>
-          <a:srgbClr val="3B696D"/>
+          <a:srgbClr val="F3F4F6"/>
         </a:solidFill>
         <a:effectLst/>
       </p:bgPr>
@@ -3099,20 +3099,22 @@
       <p:grpSpPr/>
       <p:sp>
         <p:nvSpPr>
-          <p:cNvPr id="2" name="Rectangle 1"/>
+          <p:cNvPr id="2" name="Rounded Rectangle 1"/>
           <p:cNvSpPr/>
           <p:nvPr/>
         </p:nvSpPr>
         <p:spPr>
           <a:xfrm>
-            <a:off x="2196000" y="0"/>
-            <a:ext cx="1044000" cy="1800000"/>
+            <a:off x="252000" y="230400"/>
+            <a:ext cx="1223556" cy="180000"/>
           </a:xfrm>
-          <a:prstGeom prst="rect">
-            <a:avLst/>
+          <a:prstGeom prst="roundRect">
+            <a:avLst>
+              <a:gd name="adj" fmla="val 50000"/>
+            </a:avLst>
           </a:prstGeom>
           <a:solidFill>
-            <a:srgbClr val="D6E9EB"/>
+            <a:srgbClr val="E5169B"/>
           </a:solidFill>
           <a:ln>
             <a:noFill/>
@@ -3128,188 +3130,14 @@
       </p:sp>
       <p:sp>
         <p:nvSpPr>
-          <p:cNvPr id="3" name="Oval 2"/>
-          <p:cNvSpPr/>
+          <p:cNvPr id="3" name="텍스트"/>
+          <p:cNvSpPr txBox="1"/>
           <p:nvPr/>
         </p:nvSpPr>
         <p:spPr>
           <a:xfrm>
-            <a:off x="2652480" y="488160"/>
-            <a:ext cx="131040" cy="221760"/>
-          </a:xfrm>
-          <a:prstGeom prst="ellipse">
-            <a:avLst/>
-          </a:prstGeom>
-          <a:solidFill>
-            <a:srgbClr val="666666"/>
-          </a:solidFill>
-          <a:ln>
-            <a:noFill/>
-          </a:ln>
-        </p:spPr>
-        <p:txBody>
-          <a:bodyPr rtlCol="0" anchor="ctr"/>
-          <a:lstStyle/>
-          <a:p>
-            <a:pPr algn="ctr"/>
-          </a:p>
-        </p:txBody>
-      </p:sp>
-      <p:sp>
-        <p:nvSpPr>
-          <p:cNvPr id="4" name="Oval 3"/>
-          <p:cNvSpPr/>
-          <p:nvPr/>
-        </p:nvSpPr>
-        <p:spPr>
-          <a:xfrm rot="4320000">
-            <a:off x="2767520" y="571741"/>
-            <a:ext cx="131040" cy="221760"/>
-          </a:xfrm>
-          <a:prstGeom prst="ellipse">
-            <a:avLst/>
-          </a:prstGeom>
-          <a:solidFill>
-            <a:srgbClr val="666666"/>
-          </a:solidFill>
-          <a:ln>
-            <a:noFill/>
-          </a:ln>
-        </p:spPr>
-        <p:txBody>
-          <a:bodyPr rtlCol="0" anchor="ctr"/>
-          <a:lstStyle/>
-          <a:p>
-            <a:pPr algn="ctr"/>
-          </a:p>
-        </p:txBody>
-      </p:sp>
-      <p:sp>
-        <p:nvSpPr>
-          <p:cNvPr id="5" name="Oval 4"/>
-          <p:cNvSpPr/>
-          <p:nvPr/>
-        </p:nvSpPr>
-        <p:spPr>
-          <a:xfrm rot="8640000">
-            <a:off x="2723579" y="706979"/>
-            <a:ext cx="131040" cy="221760"/>
-          </a:xfrm>
-          <a:prstGeom prst="ellipse">
-            <a:avLst/>
-          </a:prstGeom>
-          <a:solidFill>
-            <a:srgbClr val="666666"/>
-          </a:solidFill>
-          <a:ln>
-            <a:noFill/>
-          </a:ln>
-        </p:spPr>
-        <p:txBody>
-          <a:bodyPr rtlCol="0" anchor="ctr"/>
-          <a:lstStyle/>
-          <a:p>
-            <a:pPr algn="ctr"/>
-          </a:p>
-        </p:txBody>
-      </p:sp>
-      <p:sp>
-        <p:nvSpPr>
-          <p:cNvPr id="6" name="Oval 5"/>
-          <p:cNvSpPr/>
-          <p:nvPr/>
-        </p:nvSpPr>
-        <p:spPr>
-          <a:xfrm rot="12960000">
-            <a:off x="2581381" y="706979"/>
-            <a:ext cx="131040" cy="221760"/>
-          </a:xfrm>
-          <a:prstGeom prst="ellipse">
-            <a:avLst/>
-          </a:prstGeom>
-          <a:solidFill>
-            <a:srgbClr val="666666"/>
-          </a:solidFill>
-          <a:ln>
-            <a:noFill/>
-          </a:ln>
-        </p:spPr>
-        <p:txBody>
-          <a:bodyPr rtlCol="0" anchor="ctr"/>
-          <a:lstStyle/>
-          <a:p>
-            <a:pPr algn="ctr"/>
-          </a:p>
-        </p:txBody>
-      </p:sp>
-      <p:sp>
-        <p:nvSpPr>
-          <p:cNvPr id="7" name="Oval 6"/>
-          <p:cNvSpPr/>
-          <p:nvPr/>
-        </p:nvSpPr>
-        <p:spPr>
-          <a:xfrm rot="17280000">
-            <a:off x="2537440" y="571741"/>
-            <a:ext cx="131040" cy="221760"/>
-          </a:xfrm>
-          <a:prstGeom prst="ellipse">
-            <a:avLst/>
-          </a:prstGeom>
-          <a:solidFill>
-            <a:srgbClr val="666666"/>
-          </a:solidFill>
-          <a:ln>
-            <a:noFill/>
-          </a:ln>
-        </p:spPr>
-        <p:txBody>
-          <a:bodyPr rtlCol="0" anchor="ctr"/>
-          <a:lstStyle/>
-          <a:p>
-            <a:pPr algn="ctr"/>
-          </a:p>
-        </p:txBody>
-      </p:sp>
-      <p:sp>
-        <p:nvSpPr>
-          <p:cNvPr id="8" name="Oval 7"/>
-          <p:cNvSpPr/>
-          <p:nvPr/>
-        </p:nvSpPr>
-        <p:spPr>
-          <a:xfrm>
-            <a:off x="2662560" y="664560"/>
-            <a:ext cx="110880" cy="110880"/>
-          </a:xfrm>
-          <a:prstGeom prst="ellipse">
-            <a:avLst/>
-          </a:prstGeom>
-          <a:solidFill>
-            <a:srgbClr val="D9D9D9"/>
-          </a:solidFill>
-          <a:ln>
-            <a:noFill/>
-          </a:ln>
-        </p:spPr>
-        <p:txBody>
-          <a:bodyPr rtlCol="0" anchor="ctr"/>
-          <a:lstStyle/>
-          <a:p>
-            <a:pPr algn="ctr"/>
-          </a:p>
-        </p:txBody>
-      </p:sp>
-      <p:sp>
-        <p:nvSpPr>
-          <p:cNvPr id="9" name="텍스트"/>
-          <p:cNvSpPr txBox="1"/>
-          <p:nvPr/>
-        </p:nvSpPr>
-        <p:spPr>
-          <a:xfrm>
-            <a:off x="2268000" y="1224000"/>
-            <a:ext cx="900000" cy="216000"/>
+            <a:off x="252000" y="230400"/>
+            <a:ext cx="1223556" cy="180000"/>
           </a:xfrm>
           <a:prstGeom prst="rect">
             <a:avLst/>
@@ -3317,7 +3145,7 @@
           <a:noFill/>
         </p:spPr>
         <p:txBody>
-          <a:bodyPr wrap="square" lIns="0" rIns="0" tIns="0" bIns="0" anchor="t">
+          <a:bodyPr wrap="square" lIns="0" rIns="0" tIns="0" bIns="0" anchor="ctr">
             <a:spAutoFit/>
           </a:bodyPr>
           <a:lstStyle/>
@@ -3328,28 +3156,28 @@
               </a:lnSpc>
             </a:pPr>
             <a:r>
-              <a:rPr sz="800" b="1" spc="150">
+              <a:rPr sz="800" b="1">
                 <a:solidFill>
-                  <a:srgbClr val="666666"/>
+                  <a:srgbClr val="FFFFFF"/>
                 </a:solidFill>
                 <a:latin typeface="맑은 고딕"/>
                 <a:ea typeface="맑은 고딕"/>
               </a:rPr>
-              <a:t>상호명</a:t>
-            </a:r>
-          </a:p>
-        </p:txBody>
-      </p:sp>
-      <p:sp>
-        <p:nvSpPr>
-          <p:cNvPr id="10" name="텍스트"/>
+              <a:t>열쇠·도어락 기사</a:t>
+            </a:r>
+          </a:p>
+        </p:txBody>
+      </p:sp>
+      <p:sp>
+        <p:nvSpPr>
+          <p:cNvPr id="4" name="텍스트"/>
           <p:cNvSpPr txBox="1"/>
           <p:nvPr/>
         </p:nvSpPr>
         <p:spPr>
           <a:xfrm>
-            <a:off x="216000" y="331200"/>
-            <a:ext cx="1872000" cy="313692"/>
+            <a:off x="252000" y="568800"/>
+            <a:ext cx="2520000" cy="396000"/>
           </a:xfrm>
           <a:prstGeom prst="rect">
             <a:avLst/>
@@ -3364,13 +3192,13 @@
           <a:p>
             <a:pPr algn="l">
               <a:lnSpc>
-                <a:spcPts val="2755"/>
+                <a:spcPts val="3479"/>
               </a:lnSpc>
             </a:pPr>
             <a:r>
-              <a:rPr sz="1900" b="1" spc="50">
+              <a:rPr sz="2400" b="1">
                 <a:solidFill>
-                  <a:srgbClr val="FFFFFF"/>
+                  <a:srgbClr val="12151C"/>
                 </a:solidFill>
                 <a:latin typeface="맑은 고딕"/>
                 <a:ea typeface="맑은 고딕"/>
@@ -3382,14 +3210,14 @@
       </p:sp>
       <p:sp>
         <p:nvSpPr>
-          <p:cNvPr id="11" name="텍스트"/>
+          <p:cNvPr id="5" name="텍스트"/>
           <p:cNvSpPr txBox="1"/>
           <p:nvPr/>
         </p:nvSpPr>
         <p:spPr>
           <a:xfrm>
-            <a:off x="216000" y="619200"/>
-            <a:ext cx="1872000" cy="122400"/>
+            <a:off x="252000" y="993600"/>
+            <a:ext cx="2160000" cy="152401"/>
           </a:xfrm>
           <a:prstGeom prst="rect">
             <a:avLst/>
@@ -3404,61 +3232,53 @@
           <a:p>
             <a:pPr algn="l">
               <a:lnSpc>
-                <a:spcPts val="1232"/>
+                <a:spcPts val="1160"/>
               </a:lnSpc>
             </a:pPr>
             <a:r>
-              <a:rPr sz="850" b="1">
+              <a:rPr sz="800" b="0">
                 <a:solidFill>
-                  <a:srgbClr val="D6E9EB"/>
+                  <a:srgbClr val="6B7280"/>
                 </a:solidFill>
                 <a:latin typeface="맑은 고딕"/>
                 <a:ea typeface="맑은 고딕"/>
               </a:rPr>
-              <a:t>열쇠·도어락 기사</a:t>
-            </a:r>
-          </a:p>
-        </p:txBody>
-      </p:sp>
-      <p:sp>
-        <p:nvSpPr>
-          <p:cNvPr id="12" name="Rectangle 11"/>
-          <p:cNvSpPr/>
+              <a:t>상호명</a:t>
+            </a:r>
+          </a:p>
+        </p:txBody>
+      </p:sp>
+      <p:cxnSp>
+        <p:nvCxnSpPr>
+          <p:cNvPr id="6" name="Connector 5"/>
+          <p:cNvCxnSpPr/>
           <p:nvPr/>
-        </p:nvSpPr>
+        </p:nvCxnSpPr>
         <p:spPr>
           <a:xfrm>
-            <a:off x="216000" y="828000"/>
-            <a:ext cx="201600" cy="14400"/>
+            <a:off x="252000" y="1209600"/>
+            <a:ext cx="2736000" cy="0"/>
           </a:xfrm>
-          <a:prstGeom prst="rect">
+          <a:prstGeom prst="line">
             <a:avLst/>
           </a:prstGeom>
-          <a:solidFill>
-            <a:srgbClr val="D6E9EB"/>
-          </a:solidFill>
-          <a:ln>
-            <a:noFill/>
+          <a:ln w="5760">
+            <a:solidFill>
+              <a:srgbClr val="DCDFE4"/>
+            </a:solidFill>
           </a:ln>
         </p:spPr>
-        <p:txBody>
-          <a:bodyPr rtlCol="0" anchor="ctr"/>
-          <a:lstStyle/>
-          <a:p>
-            <a:pPr algn="ctr"/>
-          </a:p>
-        </p:txBody>
-      </p:sp>
-      <p:sp>
-        <p:nvSpPr>
-          <p:cNvPr id="13" name="텍스트"/>
+      </p:cxnSp>
+      <p:sp>
+        <p:nvSpPr>
+          <p:cNvPr id="7" name="텍스트"/>
           <p:cNvSpPr txBox="1"/>
           <p:nvPr/>
         </p:nvSpPr>
         <p:spPr>
           <a:xfrm>
-            <a:off x="216000" y="1008000"/>
-            <a:ext cx="122400" cy="168911"/>
+            <a:off x="252000" y="1299600"/>
+            <a:ext cx="331200" cy="99061"/>
           </a:xfrm>
           <a:prstGeom prst="rect">
             <a:avLst/>
@@ -3473,32 +3293,32 @@
           <a:p>
             <a:pPr algn="l">
               <a:lnSpc>
-                <a:spcPts val="1015"/>
+                <a:spcPts val="754"/>
               </a:lnSpc>
             </a:pPr>
             <a:r>
-              <a:rPr sz="700" b="1">
+              <a:rPr sz="520" b="1" spc="120">
                 <a:solidFill>
-                  <a:srgbClr val="D6E9EB"/>
+                  <a:srgbClr val="6B7280"/>
                 </a:solidFill>
                 <a:latin typeface="맑은 고딕"/>
                 <a:ea typeface="맑은 고딕"/>
               </a:rPr>
-              <a:t>T</a:t>
-            </a:r>
-          </a:p>
-        </p:txBody>
-      </p:sp>
-      <p:sp>
-        <p:nvSpPr>
-          <p:cNvPr id="14" name="텍스트"/>
+              <a:t>TEL</a:t>
+            </a:r>
+          </a:p>
+        </p:txBody>
+      </p:sp>
+      <p:sp>
+        <p:nvSpPr>
+          <p:cNvPr id="8" name="텍스트"/>
           <p:cNvSpPr txBox="1"/>
           <p:nvPr/>
         </p:nvSpPr>
         <p:spPr>
           <a:xfrm>
-            <a:off x="360000" y="1008000"/>
-            <a:ext cx="1584000" cy="168911"/>
+            <a:off x="583200" y="1288800"/>
+            <a:ext cx="1512000" cy="129541"/>
           </a:xfrm>
           <a:prstGeom prst="rect">
             <a:avLst/>
@@ -3513,13 +3333,13 @@
           <a:p>
             <a:pPr algn="l">
               <a:lnSpc>
-                <a:spcPts val="1015"/>
+                <a:spcPts val="986"/>
               </a:lnSpc>
             </a:pPr>
             <a:r>
-              <a:rPr sz="700" b="0">
+              <a:rPr sz="680" b="0">
                 <a:solidFill>
-                  <a:srgbClr val="FFFFFF"/>
+                  <a:srgbClr val="12151C"/>
                 </a:solidFill>
                 <a:latin typeface="맑은 고딕"/>
                 <a:ea typeface="맑은 고딕"/>
@@ -3531,14 +3351,14 @@
       </p:sp>
       <p:sp>
         <p:nvSpPr>
-          <p:cNvPr id="15" name="텍스트"/>
+          <p:cNvPr id="9" name="텍스트"/>
           <p:cNvSpPr txBox="1"/>
           <p:nvPr/>
         </p:nvSpPr>
         <p:spPr>
           <a:xfrm>
-            <a:off x="216000" y="1176911"/>
-            <a:ext cx="122400" cy="168911"/>
+            <a:off x="252000" y="1429200"/>
+            <a:ext cx="331200" cy="99061"/>
           </a:xfrm>
           <a:prstGeom prst="rect">
             <a:avLst/>
@@ -3553,32 +3373,32 @@
           <a:p>
             <a:pPr algn="l">
               <a:lnSpc>
-                <a:spcPts val="1015"/>
+                <a:spcPts val="754"/>
               </a:lnSpc>
             </a:pPr>
             <a:r>
-              <a:rPr sz="700" b="1">
+              <a:rPr sz="520" b="1" spc="120">
                 <a:solidFill>
-                  <a:srgbClr val="D6E9EB"/>
+                  <a:srgbClr val="6B7280"/>
                 </a:solidFill>
                 <a:latin typeface="맑은 고딕"/>
                 <a:ea typeface="맑은 고딕"/>
               </a:rPr>
-              <a:t>E</a:t>
-            </a:r>
-          </a:p>
-        </p:txBody>
-      </p:sp>
-      <p:sp>
-        <p:nvSpPr>
-          <p:cNvPr id="16" name="텍스트"/>
+              <a:t>MAIL</a:t>
+            </a:r>
+          </a:p>
+        </p:txBody>
+      </p:sp>
+      <p:sp>
+        <p:nvSpPr>
+          <p:cNvPr id="10" name="텍스트"/>
           <p:cNvSpPr txBox="1"/>
           <p:nvPr/>
         </p:nvSpPr>
         <p:spPr>
           <a:xfrm>
-            <a:off x="360000" y="1176911"/>
-            <a:ext cx="1584000" cy="168911"/>
+            <a:off x="583200" y="1418400"/>
+            <a:ext cx="1512000" cy="129541"/>
           </a:xfrm>
           <a:prstGeom prst="rect">
             <a:avLst/>
@@ -3593,13 +3413,13 @@
           <a:p>
             <a:pPr algn="l">
               <a:lnSpc>
-                <a:spcPts val="1015"/>
+                <a:spcPts val="986"/>
               </a:lnSpc>
             </a:pPr>
             <a:r>
-              <a:rPr sz="700" b="0">
+              <a:rPr sz="680" b="0">
                 <a:solidFill>
-                  <a:srgbClr val="FFFFFF"/>
+                  <a:srgbClr val="12151C"/>
                 </a:solidFill>
                 <a:latin typeface="맑은 고딕"/>
                 <a:ea typeface="맑은 고딕"/>
@@ -3611,14 +3431,14 @@
       </p:sp>
       <p:sp>
         <p:nvSpPr>
-          <p:cNvPr id="17" name="텍스트"/>
+          <p:cNvPr id="11" name="텍스트"/>
           <p:cNvSpPr txBox="1"/>
           <p:nvPr/>
         </p:nvSpPr>
         <p:spPr>
           <a:xfrm>
-            <a:off x="216000" y="1345822"/>
-            <a:ext cx="122400" cy="168911"/>
+            <a:off x="252000" y="1558800"/>
+            <a:ext cx="331200" cy="99061"/>
           </a:xfrm>
           <a:prstGeom prst="rect">
             <a:avLst/>
@@ -3633,32 +3453,32 @@
           <a:p>
             <a:pPr algn="l">
               <a:lnSpc>
-                <a:spcPts val="1015"/>
+                <a:spcPts val="754"/>
               </a:lnSpc>
             </a:pPr>
             <a:r>
-              <a:rPr sz="700" b="1">
+              <a:rPr sz="520" b="1" spc="120">
                 <a:solidFill>
-                  <a:srgbClr val="D6E9EB"/>
+                  <a:srgbClr val="6B7280"/>
                 </a:solidFill>
                 <a:latin typeface="맑은 고딕"/>
                 <a:ea typeface="맑은 고딕"/>
               </a:rPr>
-              <a:t>A</a:t>
-            </a:r>
-          </a:p>
-        </p:txBody>
-      </p:sp>
-      <p:sp>
-        <p:nvSpPr>
-          <p:cNvPr id="18" name="텍스트"/>
+              <a:t>ADDR</a:t>
+            </a:r>
+          </a:p>
+        </p:txBody>
+      </p:sp>
+      <p:sp>
+        <p:nvSpPr>
+          <p:cNvPr id="12" name="텍스트"/>
           <p:cNvSpPr txBox="1"/>
           <p:nvPr/>
         </p:nvSpPr>
         <p:spPr>
           <a:xfrm>
-            <a:off x="360000" y="1345822"/>
-            <a:ext cx="1584000" cy="168911"/>
+            <a:off x="583200" y="1548000"/>
+            <a:ext cx="1512000" cy="129541"/>
           </a:xfrm>
           <a:prstGeom prst="rect">
             <a:avLst/>
@@ -3673,13 +3493,13 @@
           <a:p>
             <a:pPr algn="l">
               <a:lnSpc>
-                <a:spcPts val="1015"/>
+                <a:spcPts val="986"/>
               </a:lnSpc>
             </a:pPr>
             <a:r>
-              <a:rPr sz="700" b="0">
+              <a:rPr sz="680" b="0">
                 <a:solidFill>
-                  <a:srgbClr val="FFFFFF"/>
+                  <a:srgbClr val="12151C"/>
                 </a:solidFill>
                 <a:latin typeface="맑은 고딕"/>
                 <a:ea typeface="맑은 고딕"/>
@@ -3703,7 +3523,7 @@
     <p:bg>
       <p:bgPr>
         <a:solidFill>
-          <a:srgbClr val="F2F7F8"/>
+          <a:srgbClr val="FFFFFF"/>
         </a:solidFill>
         <a:effectLst/>
       </p:bgPr>
@@ -3717,20 +3537,107 @@
       <p:grpSpPr/>
       <p:sp>
         <p:nvSpPr>
-          <p:cNvPr id="2" name="Oval 1"/>
+          <p:cNvPr id="2" name="Freeform 1"/>
           <p:cNvSpPr/>
           <p:nvPr/>
         </p:nvSpPr>
         <p:spPr>
           <a:xfrm>
-            <a:off x="1414080" y="171360"/>
-            <a:ext cx="411840" cy="696960"/>
+            <a:off x="0" y="0"/>
+            <a:ext cx="1080000" cy="1080000"/>
           </a:xfrm>
-          <a:prstGeom prst="ellipse">
+          <a:custGeom>
             <a:avLst/>
-          </a:prstGeom>
+            <a:gdLst/>
+            <a:ahLst/>
+            <a:cxnLst/>
+            <a:rect l="l" t="t" r="r" b="b"/>
+            <a:pathLst>
+              <a:path w="1080000" h="1080000">
+                <a:moveTo>
+                  <a:pt x="0" y="0"/>
+                </a:moveTo>
+                <a:lnTo>
+                  <a:pt x="1080000" y="0"/>
+                </a:lnTo>
+                <a:lnTo>
+                  <a:pt x="1077688" y="70635"/>
+                </a:lnTo>
+                <a:lnTo>
+                  <a:pt x="1070760" y="140968"/>
+                </a:lnTo>
+                <a:lnTo>
+                  <a:pt x="1059248" y="210698"/>
+                </a:lnTo>
+                <a:lnTo>
+                  <a:pt x="1043200" y="279525"/>
+                </a:lnTo>
+                <a:lnTo>
+                  <a:pt x="1022685" y="347155"/>
+                </a:lnTo>
+                <a:lnTo>
+                  <a:pt x="997790" y="413298"/>
+                </a:lnTo>
+                <a:lnTo>
+                  <a:pt x="968623" y="477672"/>
+                </a:lnTo>
+                <a:lnTo>
+                  <a:pt x="935307" y="540000"/>
+                </a:lnTo>
+                <a:lnTo>
+                  <a:pt x="897987" y="600016"/>
+                </a:lnTo>
+                <a:lnTo>
+                  <a:pt x="856822" y="657462"/>
+                </a:lnTo>
+                <a:lnTo>
+                  <a:pt x="811987" y="712093"/>
+                </a:lnTo>
+                <a:lnTo>
+                  <a:pt x="763675" y="763675"/>
+                </a:lnTo>
+                <a:lnTo>
+                  <a:pt x="712093" y="811987"/>
+                </a:lnTo>
+                <a:lnTo>
+                  <a:pt x="657462" y="856822"/>
+                </a:lnTo>
+                <a:lnTo>
+                  <a:pt x="600016" y="897987"/>
+                </a:lnTo>
+                <a:lnTo>
+                  <a:pt x="540000" y="935307"/>
+                </a:lnTo>
+                <a:lnTo>
+                  <a:pt x="477672" y="968623"/>
+                </a:lnTo>
+                <a:lnTo>
+                  <a:pt x="413298" y="997790"/>
+                </a:lnTo>
+                <a:lnTo>
+                  <a:pt x="347155" y="1022685"/>
+                </a:lnTo>
+                <a:lnTo>
+                  <a:pt x="279525" y="1043200"/>
+                </a:lnTo>
+                <a:lnTo>
+                  <a:pt x="210698" y="1059248"/>
+                </a:lnTo>
+                <a:lnTo>
+                  <a:pt x="140968" y="1070760"/>
+                </a:lnTo>
+                <a:lnTo>
+                  <a:pt x="70635" y="1077688"/>
+                </a:lnTo>
+                <a:lnTo>
+                  <a:pt x="0" y="1080000"/>
+                </a:lnTo>
+                <a:close/>
+              </a:path>
+            </a:pathLst>
+          </a:custGeom>
           <a:solidFill>
-            <a:srgbClr val="4B868B"/>
+            <a:srgbClr val="E5169B"/>
           </a:solidFill>
           <a:ln>
             <a:noFill/>
@@ -3746,20 +3653,107 @@
       </p:sp>
       <p:sp>
         <p:nvSpPr>
-          <p:cNvPr id="3" name="Oval 2"/>
+          <p:cNvPr id="3" name="Freeform 2"/>
           <p:cNvSpPr/>
           <p:nvPr/>
         </p:nvSpPr>
         <p:spPr>
-          <a:xfrm rot="4320000">
-            <a:off x="1775634" y="434044"/>
-            <a:ext cx="411840" cy="696960"/>
+          <a:xfrm>
+            <a:off x="0" y="0"/>
+            <a:ext cx="684000" cy="684000"/>
           </a:xfrm>
-          <a:prstGeom prst="ellipse">
+          <a:custGeom>
             <a:avLst/>
-          </a:prstGeom>
+            <a:gdLst/>
+            <a:ahLst/>
+            <a:cxnLst/>
+            <a:rect l="l" t="t" r="r" b="b"/>
+            <a:pathLst>
+              <a:path w="684000" h="684000">
+                <a:moveTo>
+                  <a:pt x="0" y="0"/>
+                </a:moveTo>
+                <a:lnTo>
+                  <a:pt x="684000" y="0"/>
+                </a:lnTo>
+                <a:lnTo>
+                  <a:pt x="682536" y="44736"/>
+                </a:lnTo>
+                <a:lnTo>
+                  <a:pt x="678148" y="89280"/>
+                </a:lnTo>
+                <a:lnTo>
+                  <a:pt x="670857" y="133442"/>
+                </a:lnTo>
+                <a:lnTo>
+                  <a:pt x="660693" y="177032"/>
+                </a:lnTo>
+                <a:lnTo>
+                  <a:pt x="647700" y="219865"/>
+                </a:lnTo>
+                <a:lnTo>
+                  <a:pt x="631934" y="261755"/>
+                </a:lnTo>
+                <a:lnTo>
+                  <a:pt x="613461" y="302525"/>
+                </a:lnTo>
+                <a:lnTo>
+                  <a:pt x="592361" y="342000"/>
+                </a:lnTo>
+                <a:lnTo>
+                  <a:pt x="568725" y="380010"/>
+                </a:lnTo>
+                <a:lnTo>
+                  <a:pt x="542654" y="416393"/>
+                </a:lnTo>
+                <a:lnTo>
+                  <a:pt x="514258" y="450993"/>
+                </a:lnTo>
+                <a:lnTo>
+                  <a:pt x="483661" y="483661"/>
+                </a:lnTo>
+                <a:lnTo>
+                  <a:pt x="450993" y="514258"/>
+                </a:lnTo>
+                <a:lnTo>
+                  <a:pt x="416393" y="542654"/>
+                </a:lnTo>
+                <a:lnTo>
+                  <a:pt x="380010" y="568725"/>
+                </a:lnTo>
+                <a:lnTo>
+                  <a:pt x="342000" y="592361"/>
+                </a:lnTo>
+                <a:lnTo>
+                  <a:pt x="302525" y="613461"/>
+                </a:lnTo>
+                <a:lnTo>
+                  <a:pt x="261755" y="631934"/>
+                </a:lnTo>
+                <a:lnTo>
+                  <a:pt x="219865" y="647700"/>
+                </a:lnTo>
+                <a:lnTo>
+                  <a:pt x="177032" y="660693"/>
+                </a:lnTo>
+                <a:lnTo>
+                  <a:pt x="133442" y="670857"/>
+                </a:lnTo>
+                <a:lnTo>
+                  <a:pt x="89280" y="678148"/>
+                </a:lnTo>
+                <a:lnTo>
+                  <a:pt x="44736" y="682536"/>
+                </a:lnTo>
+                <a:lnTo>
+                  <a:pt x="0" y="684000"/>
+                </a:lnTo>
+                <a:close/>
+              </a:path>
+            </a:pathLst>
+          </a:custGeom>
           <a:solidFill>
-            <a:srgbClr val="4B868B"/>
+            <a:srgbClr val="FBDEF1"/>
           </a:solidFill>
           <a:ln>
             <a:noFill/>
@@ -3775,161 +3769,14 @@
       </p:sp>
       <p:sp>
         <p:nvSpPr>
-          <p:cNvPr id="4" name="Oval 3"/>
-          <p:cNvSpPr/>
-          <p:nvPr/>
-        </p:nvSpPr>
-        <p:spPr>
-          <a:xfrm rot="8640000">
-            <a:off x="1637532" y="859076"/>
-            <a:ext cx="411840" cy="696960"/>
-          </a:xfrm>
-          <a:prstGeom prst="ellipse">
-            <a:avLst/>
-          </a:prstGeom>
-          <a:solidFill>
-            <a:srgbClr val="4B868B"/>
-          </a:solidFill>
-          <a:ln>
-            <a:noFill/>
-          </a:ln>
-        </p:spPr>
-        <p:txBody>
-          <a:bodyPr rtlCol="0" anchor="ctr"/>
-          <a:lstStyle/>
-          <a:p>
-            <a:pPr algn="ctr"/>
-          </a:p>
-        </p:txBody>
-      </p:sp>
-      <p:sp>
-        <p:nvSpPr>
-          <p:cNvPr id="5" name="Oval 4"/>
-          <p:cNvSpPr/>
-          <p:nvPr/>
-        </p:nvSpPr>
-        <p:spPr>
-          <a:xfrm rot="12960000">
-            <a:off x="1190628" y="859076"/>
-            <a:ext cx="411840" cy="696960"/>
-          </a:xfrm>
-          <a:prstGeom prst="ellipse">
-            <a:avLst/>
-          </a:prstGeom>
-          <a:solidFill>
-            <a:srgbClr val="4B868B"/>
-          </a:solidFill>
-          <a:ln>
-            <a:noFill/>
-          </a:ln>
-        </p:spPr>
-        <p:txBody>
-          <a:bodyPr rtlCol="0" anchor="ctr"/>
-          <a:lstStyle/>
-          <a:p>
-            <a:pPr algn="ctr"/>
-          </a:p>
-        </p:txBody>
-      </p:sp>
-      <p:sp>
-        <p:nvSpPr>
-          <p:cNvPr id="6" name="Oval 5"/>
-          <p:cNvSpPr/>
-          <p:nvPr/>
-        </p:nvSpPr>
-        <p:spPr>
-          <a:xfrm rot="17280000">
-            <a:off x="1052526" y="434044"/>
-            <a:ext cx="411840" cy="696960"/>
-          </a:xfrm>
-          <a:prstGeom prst="ellipse">
-            <a:avLst/>
-          </a:prstGeom>
-          <a:solidFill>
-            <a:srgbClr val="4B868B"/>
-          </a:solidFill>
-          <a:ln>
-            <a:noFill/>
-          </a:ln>
-        </p:spPr>
-        <p:txBody>
-          <a:bodyPr rtlCol="0" anchor="ctr"/>
-          <a:lstStyle/>
-          <a:p>
-            <a:pPr algn="ctr"/>
-          </a:p>
-        </p:txBody>
-      </p:sp>
-      <p:sp>
-        <p:nvSpPr>
-          <p:cNvPr id="7" name="Oval 6"/>
-          <p:cNvSpPr/>
+          <p:cNvPr id="4" name="텍스트"/>
+          <p:cNvSpPr txBox="1"/>
           <p:nvPr/>
         </p:nvSpPr>
         <p:spPr>
           <a:xfrm>
-            <a:off x="1445760" y="725760"/>
-            <a:ext cx="348480" cy="348480"/>
-          </a:xfrm>
-          <a:prstGeom prst="ellipse">
-            <a:avLst/>
-          </a:prstGeom>
-          <a:solidFill>
-            <a:srgbClr val="E2F0F1"/>
-          </a:solidFill>
-          <a:ln>
-            <a:noFill/>
-          </a:ln>
-        </p:spPr>
-        <p:txBody>
-          <a:bodyPr rtlCol="0" anchor="ctr"/>
-          <a:lstStyle/>
-          <a:p>
-            <a:pPr algn="ctr"/>
-          </a:p>
-        </p:txBody>
-      </p:sp>
-      <p:sp>
-        <p:nvSpPr>
-          <p:cNvPr id="8" name="Rectangle 7"/>
-          <p:cNvSpPr/>
-          <p:nvPr/>
-        </p:nvSpPr>
-        <p:spPr>
-          <a:xfrm>
-            <a:off x="0" y="0"/>
-            <a:ext cx="3240000" cy="1800000"/>
-          </a:xfrm>
-          <a:prstGeom prst="rect">
-            <a:avLst/>
-          </a:prstGeom>
-          <a:solidFill>
-            <a:srgbClr val="F2F7F8">
-              <a:alpha val="90000"/>
-            </a:srgbClr>
-          </a:solidFill>
-          <a:ln>
-            <a:noFill/>
-          </a:ln>
-        </p:spPr>
-        <p:txBody>
-          <a:bodyPr rtlCol="0" anchor="ctr"/>
-          <a:lstStyle/>
-          <a:p>
-            <a:pPr algn="ctr"/>
-          </a:p>
-        </p:txBody>
-      </p:sp>
-      <p:sp>
-        <p:nvSpPr>
-          <p:cNvPr id="9" name="텍스트"/>
-          <p:cNvSpPr txBox="1"/>
-          <p:nvPr/>
-        </p:nvSpPr>
-        <p:spPr>
-          <a:xfrm>
-            <a:off x="396000" y="612000"/>
-            <a:ext cx="2448000" cy="432000"/>
+            <a:off x="1188000" y="1044000"/>
+            <a:ext cx="1800000" cy="432000"/>
           </a:xfrm>
           <a:prstGeom prst="rect">
             <a:avLst/>
@@ -3937,12 +3784,12 @@
           <a:noFill/>
         </p:spPr>
         <p:txBody>
-          <a:bodyPr wrap="square" lIns="0" rIns="0" tIns="0" bIns="0" anchor="ctr">
+          <a:bodyPr wrap="square" lIns="0" rIns="0" tIns="0" bIns="0" anchor="t">
             <a:spAutoFit/>
           </a:bodyPr>
           <a:lstStyle/>
           <a:p>
-            <a:pPr algn="ctr">
+            <a:pPr algn="r">
               <a:lnSpc>
                 <a:spcPts val="1739"/>
               </a:lnSpc>
@@ -3950,55 +3797,43 @@
             <a:r>
               <a:rPr sz="1200" b="1">
                 <a:solidFill>
-                  <a:srgbClr val="274649"/>
+                  <a:srgbClr val="12151C"/>
                 </a:solidFill>
                 <a:latin typeface="맑은 고딕"/>
                 <a:ea typeface="맑은 고딕"/>
               </a:rPr>
-              <a:t>계절마다 새로운 향기를 전합니다</a:t>
-            </a:r>
-          </a:p>
-        </p:txBody>
-      </p:sp>
-      <p:sp>
-        <p:nvSpPr>
-          <p:cNvPr id="10" name="Rectangle 9"/>
-          <p:cNvSpPr/>
+              <a:t>계절마다 새로운</a:t>
+            </a:r>
+          </a:p>
+          <a:p>
+            <a:pPr algn="r">
+              <a:lnSpc>
+                <a:spcPts val="1739"/>
+              </a:lnSpc>
+            </a:pPr>
+            <a:r>
+              <a:rPr sz="1200" b="1">
+                <a:solidFill>
+                  <a:srgbClr val="12151C"/>
+                </a:solidFill>
+                <a:latin typeface="맑은 고딕"/>
+                <a:ea typeface="맑은 고딕"/>
+              </a:rPr>
+              <a:t>향기를 전합니다</a:t>
+            </a:r>
+          </a:p>
+        </p:txBody>
+      </p:sp>
+      <p:sp>
+        <p:nvSpPr>
+          <p:cNvPr id="5" name="텍스트"/>
+          <p:cNvSpPr txBox="1"/>
           <p:nvPr/>
         </p:nvSpPr>
         <p:spPr>
           <a:xfrm>
-            <a:off x="1512000" y="1173600"/>
-            <a:ext cx="216000" cy="10800"/>
-          </a:xfrm>
-          <a:prstGeom prst="rect">
-            <a:avLst/>
-          </a:prstGeom>
-          <a:solidFill>
-            <a:srgbClr val="4B868B"/>
-          </a:solidFill>
-          <a:ln>
-            <a:noFill/>
-          </a:ln>
-        </p:spPr>
-        <p:txBody>
-          <a:bodyPr rtlCol="0" anchor="ctr"/>
-          <a:lstStyle/>
-          <a:p>
-            <a:pPr algn="ctr"/>
-          </a:p>
-        </p:txBody>
-      </p:sp>
-      <p:sp>
-        <p:nvSpPr>
-          <p:cNvPr id="11" name="텍스트"/>
-          <p:cNvSpPr txBox="1"/>
-          <p:nvPr/>
-        </p:nvSpPr>
-        <p:spPr>
-          <a:xfrm>
-            <a:off x="360000" y="1288800"/>
-            <a:ext cx="2520000" cy="108000"/>
+            <a:off x="1188000" y="1526400"/>
+            <a:ext cx="1800000" cy="123826"/>
           </a:xfrm>
           <a:prstGeom prst="rect">
             <a:avLst/>
@@ -4011,15 +3846,15 @@
           </a:bodyPr>
           <a:lstStyle/>
           <a:p>
-            <a:pPr algn="ctr">
+            <a:pPr algn="r">
               <a:lnSpc>
-                <a:spcPts val="1087"/>
+                <a:spcPts val="942"/>
               </a:lnSpc>
             </a:pPr>
             <a:r>
-              <a:rPr sz="750" b="1" spc="300">
+              <a:rPr sz="650" b="1" spc="200">
                 <a:solidFill>
-                  <a:srgbClr val="5E7072"/>
+                  <a:srgbClr val="6B7280"/>
                 </a:solidFill>
                 <a:latin typeface="맑은 고딕"/>
                 <a:ea typeface="맑은 고딕"/>

--- a/public/fun/cards/life/life-09.pptx
+++ b/public/fun/cards/life/life-09.pptx
@@ -3099,19 +3099,17 @@
       <p:grpSpPr/>
       <p:sp>
         <p:nvSpPr>
-          <p:cNvPr id="2" name="Rounded Rectangle 1"/>
+          <p:cNvPr id="2" name="Oval 1"/>
           <p:cNvSpPr/>
           <p:nvPr/>
         </p:nvSpPr>
         <p:spPr>
           <a:xfrm>
-            <a:off x="252000" y="230400"/>
-            <a:ext cx="1223556" cy="180000"/>
-          </a:xfrm>
-          <a:prstGeom prst="roundRect">
-            <a:avLst>
-              <a:gd name="adj" fmla="val 50000"/>
-            </a:avLst>
+            <a:off x="2658960" y="239760"/>
+            <a:ext cx="24480" cy="24480"/>
+          </a:xfrm>
+          <a:prstGeom prst="ellipse">
+            <a:avLst/>
           </a:prstGeom>
           <a:solidFill>
             <a:srgbClr val="E5169B"/>
@@ -3130,14 +3128,596 @@
       </p:sp>
       <p:sp>
         <p:nvSpPr>
-          <p:cNvPr id="3" name="텍스트"/>
+          <p:cNvPr id="3" name="Oval 2"/>
+          <p:cNvSpPr/>
+          <p:nvPr/>
+        </p:nvSpPr>
+        <p:spPr>
+          <a:xfrm>
+            <a:off x="2658960" y="333360"/>
+            <a:ext cx="24480" cy="24480"/>
+          </a:xfrm>
+          <a:prstGeom prst="ellipse">
+            <a:avLst/>
+          </a:prstGeom>
+          <a:solidFill>
+            <a:srgbClr val="DCDFE4"/>
+          </a:solidFill>
+          <a:ln>
+            <a:noFill/>
+          </a:ln>
+        </p:spPr>
+        <p:txBody>
+          <a:bodyPr rtlCol="0" anchor="ctr"/>
+          <a:lstStyle/>
+          <a:p>
+            <a:pPr algn="ctr"/>
+          </a:p>
+        </p:txBody>
+      </p:sp>
+      <p:sp>
+        <p:nvSpPr>
+          <p:cNvPr id="4" name="Oval 3"/>
+          <p:cNvSpPr/>
+          <p:nvPr/>
+        </p:nvSpPr>
+        <p:spPr>
+          <a:xfrm>
+            <a:off x="2658960" y="426960"/>
+            <a:ext cx="24480" cy="24480"/>
+          </a:xfrm>
+          <a:prstGeom prst="ellipse">
+            <a:avLst/>
+          </a:prstGeom>
+          <a:solidFill>
+            <a:srgbClr val="DCDFE4"/>
+          </a:solidFill>
+          <a:ln>
+            <a:noFill/>
+          </a:ln>
+        </p:spPr>
+        <p:txBody>
+          <a:bodyPr rtlCol="0" anchor="ctr"/>
+          <a:lstStyle/>
+          <a:p>
+            <a:pPr algn="ctr"/>
+          </a:p>
+        </p:txBody>
+      </p:sp>
+      <p:sp>
+        <p:nvSpPr>
+          <p:cNvPr id="5" name="Oval 4"/>
+          <p:cNvSpPr/>
+          <p:nvPr/>
+        </p:nvSpPr>
+        <p:spPr>
+          <a:xfrm>
+            <a:off x="2658960" y="520560"/>
+            <a:ext cx="24480" cy="24480"/>
+          </a:xfrm>
+          <a:prstGeom prst="ellipse">
+            <a:avLst/>
+          </a:prstGeom>
+          <a:solidFill>
+            <a:srgbClr val="DCDFE4"/>
+          </a:solidFill>
+          <a:ln>
+            <a:noFill/>
+          </a:ln>
+        </p:spPr>
+        <p:txBody>
+          <a:bodyPr rtlCol="0" anchor="ctr"/>
+          <a:lstStyle/>
+          <a:p>
+            <a:pPr algn="ctr"/>
+          </a:p>
+        </p:txBody>
+      </p:sp>
+      <p:sp>
+        <p:nvSpPr>
+          <p:cNvPr id="6" name="Oval 5"/>
+          <p:cNvSpPr/>
+          <p:nvPr/>
+        </p:nvSpPr>
+        <p:spPr>
+          <a:xfrm>
+            <a:off x="2752560" y="239760"/>
+            <a:ext cx="24480" cy="24480"/>
+          </a:xfrm>
+          <a:prstGeom prst="ellipse">
+            <a:avLst/>
+          </a:prstGeom>
+          <a:solidFill>
+            <a:srgbClr val="DCDFE4"/>
+          </a:solidFill>
+          <a:ln>
+            <a:noFill/>
+          </a:ln>
+        </p:spPr>
+        <p:txBody>
+          <a:bodyPr rtlCol="0" anchor="ctr"/>
+          <a:lstStyle/>
+          <a:p>
+            <a:pPr algn="ctr"/>
+          </a:p>
+        </p:txBody>
+      </p:sp>
+      <p:sp>
+        <p:nvSpPr>
+          <p:cNvPr id="7" name="Oval 6"/>
+          <p:cNvSpPr/>
+          <p:nvPr/>
+        </p:nvSpPr>
+        <p:spPr>
+          <a:xfrm>
+            <a:off x="2752560" y="333360"/>
+            <a:ext cx="24480" cy="24480"/>
+          </a:xfrm>
+          <a:prstGeom prst="ellipse">
+            <a:avLst/>
+          </a:prstGeom>
+          <a:solidFill>
+            <a:srgbClr val="DCDFE4"/>
+          </a:solidFill>
+          <a:ln>
+            <a:noFill/>
+          </a:ln>
+        </p:spPr>
+        <p:txBody>
+          <a:bodyPr rtlCol="0" anchor="ctr"/>
+          <a:lstStyle/>
+          <a:p>
+            <a:pPr algn="ctr"/>
+          </a:p>
+        </p:txBody>
+      </p:sp>
+      <p:sp>
+        <p:nvSpPr>
+          <p:cNvPr id="8" name="Oval 7"/>
+          <p:cNvSpPr/>
+          <p:nvPr/>
+        </p:nvSpPr>
+        <p:spPr>
+          <a:xfrm>
+            <a:off x="2752560" y="426960"/>
+            <a:ext cx="24480" cy="24480"/>
+          </a:xfrm>
+          <a:prstGeom prst="ellipse">
+            <a:avLst/>
+          </a:prstGeom>
+          <a:solidFill>
+            <a:srgbClr val="DCDFE4"/>
+          </a:solidFill>
+          <a:ln>
+            <a:noFill/>
+          </a:ln>
+        </p:spPr>
+        <p:txBody>
+          <a:bodyPr rtlCol="0" anchor="ctr"/>
+          <a:lstStyle/>
+          <a:p>
+            <a:pPr algn="ctr"/>
+          </a:p>
+        </p:txBody>
+      </p:sp>
+      <p:sp>
+        <p:nvSpPr>
+          <p:cNvPr id="9" name="Oval 8"/>
+          <p:cNvSpPr/>
+          <p:nvPr/>
+        </p:nvSpPr>
+        <p:spPr>
+          <a:xfrm>
+            <a:off x="2752560" y="520560"/>
+            <a:ext cx="24480" cy="24480"/>
+          </a:xfrm>
+          <a:prstGeom prst="ellipse">
+            <a:avLst/>
+          </a:prstGeom>
+          <a:solidFill>
+            <a:srgbClr val="E5169B"/>
+          </a:solidFill>
+          <a:ln>
+            <a:noFill/>
+          </a:ln>
+        </p:spPr>
+        <p:txBody>
+          <a:bodyPr rtlCol="0" anchor="ctr"/>
+          <a:lstStyle/>
+          <a:p>
+            <a:pPr algn="ctr"/>
+          </a:p>
+        </p:txBody>
+      </p:sp>
+      <p:sp>
+        <p:nvSpPr>
+          <p:cNvPr id="10" name="Oval 9"/>
+          <p:cNvSpPr/>
+          <p:nvPr/>
+        </p:nvSpPr>
+        <p:spPr>
+          <a:xfrm>
+            <a:off x="2846160" y="239760"/>
+            <a:ext cx="24480" cy="24480"/>
+          </a:xfrm>
+          <a:prstGeom prst="ellipse">
+            <a:avLst/>
+          </a:prstGeom>
+          <a:solidFill>
+            <a:srgbClr val="DCDFE4"/>
+          </a:solidFill>
+          <a:ln>
+            <a:noFill/>
+          </a:ln>
+        </p:spPr>
+        <p:txBody>
+          <a:bodyPr rtlCol="0" anchor="ctr"/>
+          <a:lstStyle/>
+          <a:p>
+            <a:pPr algn="ctr"/>
+          </a:p>
+        </p:txBody>
+      </p:sp>
+      <p:sp>
+        <p:nvSpPr>
+          <p:cNvPr id="11" name="Oval 10"/>
+          <p:cNvSpPr/>
+          <p:nvPr/>
+        </p:nvSpPr>
+        <p:spPr>
+          <a:xfrm>
+            <a:off x="2846160" y="333360"/>
+            <a:ext cx="24480" cy="24480"/>
+          </a:xfrm>
+          <a:prstGeom prst="ellipse">
+            <a:avLst/>
+          </a:prstGeom>
+          <a:solidFill>
+            <a:srgbClr val="DCDFE4"/>
+          </a:solidFill>
+          <a:ln>
+            <a:noFill/>
+          </a:ln>
+        </p:spPr>
+        <p:txBody>
+          <a:bodyPr rtlCol="0" anchor="ctr"/>
+          <a:lstStyle/>
+          <a:p>
+            <a:pPr algn="ctr"/>
+          </a:p>
+        </p:txBody>
+      </p:sp>
+      <p:sp>
+        <p:nvSpPr>
+          <p:cNvPr id="12" name="Oval 11"/>
+          <p:cNvSpPr/>
+          <p:nvPr/>
+        </p:nvSpPr>
+        <p:spPr>
+          <a:xfrm>
+            <a:off x="2846160" y="426960"/>
+            <a:ext cx="24480" cy="24480"/>
+          </a:xfrm>
+          <a:prstGeom prst="ellipse">
+            <a:avLst/>
+          </a:prstGeom>
+          <a:solidFill>
+            <a:srgbClr val="E5169B"/>
+          </a:solidFill>
+          <a:ln>
+            <a:noFill/>
+          </a:ln>
+        </p:spPr>
+        <p:txBody>
+          <a:bodyPr rtlCol="0" anchor="ctr"/>
+          <a:lstStyle/>
+          <a:p>
+            <a:pPr algn="ctr"/>
+          </a:p>
+        </p:txBody>
+      </p:sp>
+      <p:sp>
+        <p:nvSpPr>
+          <p:cNvPr id="13" name="Oval 12"/>
+          <p:cNvSpPr/>
+          <p:nvPr/>
+        </p:nvSpPr>
+        <p:spPr>
+          <a:xfrm>
+            <a:off x="2846160" y="520560"/>
+            <a:ext cx="24480" cy="24480"/>
+          </a:xfrm>
+          <a:prstGeom prst="ellipse">
+            <a:avLst/>
+          </a:prstGeom>
+          <a:solidFill>
+            <a:srgbClr val="DCDFE4"/>
+          </a:solidFill>
+          <a:ln>
+            <a:noFill/>
+          </a:ln>
+        </p:spPr>
+        <p:txBody>
+          <a:bodyPr rtlCol="0" anchor="ctr"/>
+          <a:lstStyle/>
+          <a:p>
+            <a:pPr algn="ctr"/>
+          </a:p>
+        </p:txBody>
+      </p:sp>
+      <p:sp>
+        <p:nvSpPr>
+          <p:cNvPr id="14" name="Oval 13"/>
+          <p:cNvSpPr/>
+          <p:nvPr/>
+        </p:nvSpPr>
+        <p:spPr>
+          <a:xfrm>
+            <a:off x="2939760" y="239760"/>
+            <a:ext cx="24480" cy="24480"/>
+          </a:xfrm>
+          <a:prstGeom prst="ellipse">
+            <a:avLst/>
+          </a:prstGeom>
+          <a:solidFill>
+            <a:srgbClr val="DCDFE4"/>
+          </a:solidFill>
+          <a:ln>
+            <a:noFill/>
+          </a:ln>
+        </p:spPr>
+        <p:txBody>
+          <a:bodyPr rtlCol="0" anchor="ctr"/>
+          <a:lstStyle/>
+          <a:p>
+            <a:pPr algn="ctr"/>
+          </a:p>
+        </p:txBody>
+      </p:sp>
+      <p:sp>
+        <p:nvSpPr>
+          <p:cNvPr id="15" name="Oval 14"/>
+          <p:cNvSpPr/>
+          <p:nvPr/>
+        </p:nvSpPr>
+        <p:spPr>
+          <a:xfrm>
+            <a:off x="2939760" y="333360"/>
+            <a:ext cx="24480" cy="24480"/>
+          </a:xfrm>
+          <a:prstGeom prst="ellipse">
+            <a:avLst/>
+          </a:prstGeom>
+          <a:solidFill>
+            <a:srgbClr val="E5169B"/>
+          </a:solidFill>
+          <a:ln>
+            <a:noFill/>
+          </a:ln>
+        </p:spPr>
+        <p:txBody>
+          <a:bodyPr rtlCol="0" anchor="ctr"/>
+          <a:lstStyle/>
+          <a:p>
+            <a:pPr algn="ctr"/>
+          </a:p>
+        </p:txBody>
+      </p:sp>
+      <p:sp>
+        <p:nvSpPr>
+          <p:cNvPr id="16" name="Oval 15"/>
+          <p:cNvSpPr/>
+          <p:nvPr/>
+        </p:nvSpPr>
+        <p:spPr>
+          <a:xfrm>
+            <a:off x="2939760" y="426960"/>
+            <a:ext cx="24480" cy="24480"/>
+          </a:xfrm>
+          <a:prstGeom prst="ellipse">
+            <a:avLst/>
+          </a:prstGeom>
+          <a:solidFill>
+            <a:srgbClr val="DCDFE4"/>
+          </a:solidFill>
+          <a:ln>
+            <a:noFill/>
+          </a:ln>
+        </p:spPr>
+        <p:txBody>
+          <a:bodyPr rtlCol="0" anchor="ctr"/>
+          <a:lstStyle/>
+          <a:p>
+            <a:pPr algn="ctr"/>
+          </a:p>
+        </p:txBody>
+      </p:sp>
+      <p:sp>
+        <p:nvSpPr>
+          <p:cNvPr id="17" name="Oval 16"/>
+          <p:cNvSpPr/>
+          <p:nvPr/>
+        </p:nvSpPr>
+        <p:spPr>
+          <a:xfrm>
+            <a:off x="2939760" y="520560"/>
+            <a:ext cx="24480" cy="24480"/>
+          </a:xfrm>
+          <a:prstGeom prst="ellipse">
+            <a:avLst/>
+          </a:prstGeom>
+          <a:solidFill>
+            <a:srgbClr val="DCDFE4"/>
+          </a:solidFill>
+          <a:ln>
+            <a:noFill/>
+          </a:ln>
+        </p:spPr>
+        <p:txBody>
+          <a:bodyPr rtlCol="0" anchor="ctr"/>
+          <a:lstStyle/>
+          <a:p>
+            <a:pPr algn="ctr"/>
+          </a:p>
+        </p:txBody>
+      </p:sp>
+      <p:sp>
+        <p:nvSpPr>
+          <p:cNvPr id="18" name="Oval 17"/>
+          <p:cNvSpPr/>
+          <p:nvPr/>
+        </p:nvSpPr>
+        <p:spPr>
+          <a:xfrm>
+            <a:off x="3033360" y="239760"/>
+            <a:ext cx="24480" cy="24480"/>
+          </a:xfrm>
+          <a:prstGeom prst="ellipse">
+            <a:avLst/>
+          </a:prstGeom>
+          <a:solidFill>
+            <a:srgbClr val="E5169B"/>
+          </a:solidFill>
+          <a:ln>
+            <a:noFill/>
+          </a:ln>
+        </p:spPr>
+        <p:txBody>
+          <a:bodyPr rtlCol="0" anchor="ctr"/>
+          <a:lstStyle/>
+          <a:p>
+            <a:pPr algn="ctr"/>
+          </a:p>
+        </p:txBody>
+      </p:sp>
+      <p:sp>
+        <p:nvSpPr>
+          <p:cNvPr id="19" name="Oval 18"/>
+          <p:cNvSpPr/>
+          <p:nvPr/>
+        </p:nvSpPr>
+        <p:spPr>
+          <a:xfrm>
+            <a:off x="3033360" y="333360"/>
+            <a:ext cx="24480" cy="24480"/>
+          </a:xfrm>
+          <a:prstGeom prst="ellipse">
+            <a:avLst/>
+          </a:prstGeom>
+          <a:solidFill>
+            <a:srgbClr val="DCDFE4"/>
+          </a:solidFill>
+          <a:ln>
+            <a:noFill/>
+          </a:ln>
+        </p:spPr>
+        <p:txBody>
+          <a:bodyPr rtlCol="0" anchor="ctr"/>
+          <a:lstStyle/>
+          <a:p>
+            <a:pPr algn="ctr"/>
+          </a:p>
+        </p:txBody>
+      </p:sp>
+      <p:sp>
+        <p:nvSpPr>
+          <p:cNvPr id="20" name="Oval 19"/>
+          <p:cNvSpPr/>
+          <p:nvPr/>
+        </p:nvSpPr>
+        <p:spPr>
+          <a:xfrm>
+            <a:off x="3033360" y="426960"/>
+            <a:ext cx="24480" cy="24480"/>
+          </a:xfrm>
+          <a:prstGeom prst="ellipse">
+            <a:avLst/>
+          </a:prstGeom>
+          <a:solidFill>
+            <a:srgbClr val="DCDFE4"/>
+          </a:solidFill>
+          <a:ln>
+            <a:noFill/>
+          </a:ln>
+        </p:spPr>
+        <p:txBody>
+          <a:bodyPr rtlCol="0" anchor="ctr"/>
+          <a:lstStyle/>
+          <a:p>
+            <a:pPr algn="ctr"/>
+          </a:p>
+        </p:txBody>
+      </p:sp>
+      <p:sp>
+        <p:nvSpPr>
+          <p:cNvPr id="21" name="Oval 20"/>
+          <p:cNvSpPr/>
+          <p:nvPr/>
+        </p:nvSpPr>
+        <p:spPr>
+          <a:xfrm>
+            <a:off x="3033360" y="520560"/>
+            <a:ext cx="24480" cy="24480"/>
+          </a:xfrm>
+          <a:prstGeom prst="ellipse">
+            <a:avLst/>
+          </a:prstGeom>
+          <a:solidFill>
+            <a:srgbClr val="DCDFE4"/>
+          </a:solidFill>
+          <a:ln>
+            <a:noFill/>
+          </a:ln>
+        </p:spPr>
+        <p:txBody>
+          <a:bodyPr rtlCol="0" anchor="ctr"/>
+          <a:lstStyle/>
+          <a:p>
+            <a:pPr algn="ctr"/>
+          </a:p>
+        </p:txBody>
+      </p:sp>
+      <p:sp>
+        <p:nvSpPr>
+          <p:cNvPr id="22" name="Rounded Rectangle 21"/>
+          <p:cNvSpPr/>
+          <p:nvPr/>
+        </p:nvSpPr>
+        <p:spPr>
+          <a:xfrm>
+            <a:off x="252000" y="237600"/>
+            <a:ext cx="1066505" cy="165600"/>
+          </a:xfrm>
+          <a:prstGeom prst="roundRect">
+            <a:avLst>
+              <a:gd name="adj" fmla="val 50000"/>
+            </a:avLst>
+          </a:prstGeom>
+          <a:noFill/>
+          <a:ln w="5760">
+            <a:solidFill>
+              <a:srgbClr val="E5169B"/>
+            </a:solidFill>
+          </a:ln>
+        </p:spPr>
+        <p:txBody>
+          <a:bodyPr rtlCol="0" anchor="ctr"/>
+          <a:lstStyle/>
+          <a:p>
+            <a:pPr algn="ctr"/>
+          </a:p>
+        </p:txBody>
+      </p:sp>
+      <p:sp>
+        <p:nvSpPr>
+          <p:cNvPr id="23" name="텍스트"/>
           <p:cNvSpPr txBox="1"/>
           <p:nvPr/>
         </p:nvSpPr>
         <p:spPr>
           <a:xfrm>
-            <a:off x="252000" y="230400"/>
-            <a:ext cx="1223556" cy="180000"/>
+            <a:off x="252000" y="237600"/>
+            <a:ext cx="1066505" cy="165600"/>
           </a:xfrm>
           <a:prstGeom prst="rect">
             <a:avLst/>
@@ -3152,13 +3732,13 @@
           <a:p>
             <a:pPr algn="ctr">
               <a:lnSpc>
-                <a:spcPts val="1160"/>
+                <a:spcPts val="956"/>
               </a:lnSpc>
             </a:pPr>
             <a:r>
-              <a:rPr sz="800" b="1">
+              <a:rPr sz="660" b="1" spc="80">
                 <a:solidFill>
-                  <a:srgbClr val="FFFFFF"/>
+                  <a:srgbClr val="12151C"/>
                 </a:solidFill>
                 <a:latin typeface="맑은 고딕"/>
                 <a:ea typeface="맑은 고딕"/>
@@ -3170,14 +3750,14 @@
       </p:sp>
       <p:sp>
         <p:nvSpPr>
-          <p:cNvPr id="4" name="텍스트"/>
+          <p:cNvPr id="24" name="텍스트"/>
           <p:cNvSpPr txBox="1"/>
           <p:nvPr/>
         </p:nvSpPr>
         <p:spPr>
           <a:xfrm>
-            <a:off x="252000" y="568800"/>
-            <a:ext cx="2520000" cy="396000"/>
+            <a:off x="252000" y="583200"/>
+            <a:ext cx="2160000" cy="237600"/>
           </a:xfrm>
           <a:prstGeom prst="rect">
             <a:avLst/>
@@ -3192,11 +3772,11 @@
           <a:p>
             <a:pPr algn="l">
               <a:lnSpc>
-                <a:spcPts val="3479"/>
+                <a:spcPts val="1957"/>
               </a:lnSpc>
             </a:pPr>
             <a:r>
-              <a:rPr sz="2400" b="1">
+              <a:rPr sz="1350" b="1" spc="120">
                 <a:solidFill>
                   <a:srgbClr val="12151C"/>
                 </a:solidFill>
@@ -3210,14 +3790,14 @@
       </p:sp>
       <p:sp>
         <p:nvSpPr>
-          <p:cNvPr id="5" name="텍스트"/>
+          <p:cNvPr id="25" name="텍스트"/>
           <p:cNvSpPr txBox="1"/>
           <p:nvPr/>
         </p:nvSpPr>
         <p:spPr>
           <a:xfrm>
-            <a:off x="252000" y="993600"/>
-            <a:ext cx="2160000" cy="152401"/>
+            <a:off x="252000" y="878400"/>
+            <a:ext cx="1800000" cy="123826"/>
           </a:xfrm>
           <a:prstGeom prst="rect">
             <a:avLst/>
@@ -3232,11 +3812,11 @@
           <a:p>
             <a:pPr algn="l">
               <a:lnSpc>
-                <a:spcPts val="1160"/>
+                <a:spcPts val="942"/>
               </a:lnSpc>
             </a:pPr>
             <a:r>
-              <a:rPr sz="800" b="0">
+              <a:rPr sz="650" b="1" spc="220">
                 <a:solidFill>
                   <a:srgbClr val="6B7280"/>
                 </a:solidFill>
@@ -3250,19 +3830,19 @@
       </p:sp>
       <p:cxnSp>
         <p:nvCxnSpPr>
-          <p:cNvPr id="6" name="Connector 5"/>
+          <p:cNvPr id="26" name="Connector 25"/>
           <p:cNvCxnSpPr/>
           <p:nvPr/>
         </p:nvCxnSpPr>
         <p:spPr>
           <a:xfrm>
-            <a:off x="252000" y="1209600"/>
+            <a:off x="252000" y="1144800"/>
             <a:ext cx="2736000" cy="0"/>
           </a:xfrm>
           <a:prstGeom prst="line">
             <a:avLst/>
           </a:prstGeom>
-          <a:ln w="5760">
+          <a:ln w="3600">
             <a:solidFill>
               <a:srgbClr val="DCDFE4"/>
             </a:solidFill>
@@ -3271,14 +3851,14 @@
       </p:cxnSp>
       <p:sp>
         <p:nvSpPr>
-          <p:cNvPr id="7" name="텍스트"/>
+          <p:cNvPr id="27" name="텍스트"/>
           <p:cNvSpPr txBox="1"/>
           <p:nvPr/>
         </p:nvSpPr>
         <p:spPr>
           <a:xfrm>
-            <a:off x="252000" y="1299600"/>
-            <a:ext cx="331200" cy="99061"/>
+            <a:off x="252000" y="1242000"/>
+            <a:ext cx="331200" cy="91441"/>
           </a:xfrm>
           <a:prstGeom prst="rect">
             <a:avLst/>
@@ -3293,11 +3873,11 @@
           <a:p>
             <a:pPr algn="l">
               <a:lnSpc>
-                <a:spcPts val="754"/>
+                <a:spcPts val="696"/>
               </a:lnSpc>
             </a:pPr>
             <a:r>
-              <a:rPr sz="520" b="1" spc="120">
+              <a:rPr sz="480" b="1" spc="140">
                 <a:solidFill>
                   <a:srgbClr val="6B7280"/>
                 </a:solidFill>
@@ -3311,14 +3891,14 @@
       </p:sp>
       <p:sp>
         <p:nvSpPr>
-          <p:cNvPr id="8" name="텍스트"/>
+          <p:cNvPr id="28" name="텍스트"/>
           <p:cNvSpPr txBox="1"/>
           <p:nvPr/>
         </p:nvSpPr>
         <p:spPr>
           <a:xfrm>
-            <a:off x="583200" y="1288800"/>
-            <a:ext cx="1512000" cy="129541"/>
+            <a:off x="583200" y="1231200"/>
+            <a:ext cx="1512000" cy="123826"/>
           </a:xfrm>
           <a:prstGeom prst="rect">
             <a:avLst/>
@@ -3333,11 +3913,11 @@
           <a:p>
             <a:pPr algn="l">
               <a:lnSpc>
-                <a:spcPts val="986"/>
+                <a:spcPts val="942"/>
               </a:lnSpc>
             </a:pPr>
             <a:r>
-              <a:rPr sz="680" b="0">
+              <a:rPr sz="650" b="0">
                 <a:solidFill>
                   <a:srgbClr val="12151C"/>
                 </a:solidFill>
@@ -3351,14 +3931,14 @@
       </p:sp>
       <p:sp>
         <p:nvSpPr>
-          <p:cNvPr id="9" name="텍스트"/>
+          <p:cNvPr id="29" name="텍스트"/>
           <p:cNvSpPr txBox="1"/>
           <p:nvPr/>
         </p:nvSpPr>
         <p:spPr>
           <a:xfrm>
-            <a:off x="252000" y="1429200"/>
-            <a:ext cx="331200" cy="99061"/>
+            <a:off x="252000" y="1371600"/>
+            <a:ext cx="331200" cy="91441"/>
           </a:xfrm>
           <a:prstGeom prst="rect">
             <a:avLst/>
@@ -3373,11 +3953,11 @@
           <a:p>
             <a:pPr algn="l">
               <a:lnSpc>
-                <a:spcPts val="754"/>
+                <a:spcPts val="696"/>
               </a:lnSpc>
             </a:pPr>
             <a:r>
-              <a:rPr sz="520" b="1" spc="120">
+              <a:rPr sz="480" b="1" spc="140">
                 <a:solidFill>
                   <a:srgbClr val="6B7280"/>
                 </a:solidFill>
@@ -3391,14 +3971,14 @@
       </p:sp>
       <p:sp>
         <p:nvSpPr>
-          <p:cNvPr id="10" name="텍스트"/>
+          <p:cNvPr id="30" name="텍스트"/>
           <p:cNvSpPr txBox="1"/>
           <p:nvPr/>
         </p:nvSpPr>
         <p:spPr>
           <a:xfrm>
-            <a:off x="583200" y="1418400"/>
-            <a:ext cx="1512000" cy="129541"/>
+            <a:off x="583200" y="1360800"/>
+            <a:ext cx="1512000" cy="123826"/>
           </a:xfrm>
           <a:prstGeom prst="rect">
             <a:avLst/>
@@ -3413,11 +3993,11 @@
           <a:p>
             <a:pPr algn="l">
               <a:lnSpc>
-                <a:spcPts val="986"/>
+                <a:spcPts val="942"/>
               </a:lnSpc>
             </a:pPr>
             <a:r>
-              <a:rPr sz="680" b="0">
+              <a:rPr sz="650" b="0">
                 <a:solidFill>
                   <a:srgbClr val="12151C"/>
                 </a:solidFill>
@@ -3431,14 +4011,14 @@
       </p:sp>
       <p:sp>
         <p:nvSpPr>
-          <p:cNvPr id="11" name="텍스트"/>
+          <p:cNvPr id="31" name="텍스트"/>
           <p:cNvSpPr txBox="1"/>
           <p:nvPr/>
         </p:nvSpPr>
         <p:spPr>
           <a:xfrm>
-            <a:off x="252000" y="1558800"/>
-            <a:ext cx="331200" cy="99061"/>
+            <a:off x="252000" y="1501200"/>
+            <a:ext cx="331200" cy="91441"/>
           </a:xfrm>
           <a:prstGeom prst="rect">
             <a:avLst/>
@@ -3453,11 +4033,11 @@
           <a:p>
             <a:pPr algn="l">
               <a:lnSpc>
-                <a:spcPts val="754"/>
+                <a:spcPts val="696"/>
               </a:lnSpc>
             </a:pPr>
             <a:r>
-              <a:rPr sz="520" b="1" spc="120">
+              <a:rPr sz="480" b="1" spc="140">
                 <a:solidFill>
                   <a:srgbClr val="6B7280"/>
                 </a:solidFill>
@@ -3471,14 +4051,14 @@
       </p:sp>
       <p:sp>
         <p:nvSpPr>
-          <p:cNvPr id="12" name="텍스트"/>
+          <p:cNvPr id="32" name="텍스트"/>
           <p:cNvSpPr txBox="1"/>
           <p:nvPr/>
         </p:nvSpPr>
         <p:spPr>
           <a:xfrm>
-            <a:off x="583200" y="1548000"/>
-            <a:ext cx="1512000" cy="129541"/>
+            <a:off x="583200" y="1490400"/>
+            <a:ext cx="1512000" cy="123826"/>
           </a:xfrm>
           <a:prstGeom prst="rect">
             <a:avLst/>
@@ -3493,11 +4073,11 @@
           <a:p>
             <a:pPr algn="l">
               <a:lnSpc>
-                <a:spcPts val="986"/>
+                <a:spcPts val="942"/>
               </a:lnSpc>
             </a:pPr>
             <a:r>
-              <a:rPr sz="680" b="0">
+              <a:rPr sz="650" b="0">
                 <a:solidFill>
                   <a:srgbClr val="12151C"/>
                 </a:solidFill>
@@ -3509,6 +4089,48 @@
           </a:p>
         </p:txBody>
       </p:sp>
+      <p:cxnSp>
+        <p:nvCxnSpPr>
+          <p:cNvPr id="33" name="Connector 32"/>
+          <p:cNvCxnSpPr/>
+          <p:nvPr/>
+        </p:nvCxnSpPr>
+        <p:spPr>
+          <a:xfrm>
+            <a:off x="2955600" y="1584000"/>
+            <a:ext cx="64800" cy="0"/>
+          </a:xfrm>
+          <a:prstGeom prst="line">
+            <a:avLst/>
+          </a:prstGeom>
+          <a:ln w="3600">
+            <a:solidFill>
+              <a:srgbClr val="DCDFE4"/>
+            </a:solidFill>
+          </a:ln>
+        </p:spPr>
+      </p:cxnSp>
+      <p:cxnSp>
+        <p:nvCxnSpPr>
+          <p:cNvPr id="34" name="Connector 33"/>
+          <p:cNvCxnSpPr/>
+          <p:nvPr/>
+        </p:nvCxnSpPr>
+        <p:spPr>
+          <a:xfrm>
+            <a:off x="2988000" y="1551600"/>
+            <a:ext cx="0" cy="64800"/>
+          </a:xfrm>
+          <a:prstGeom prst="line">
+            <a:avLst/>
+          </a:prstGeom>
+          <a:ln w="3600">
+            <a:solidFill>
+              <a:srgbClr val="DCDFE4"/>
+            </a:solidFill>
+          </a:ln>
+        </p:spPr>
+      </p:cxnSp>
     </p:spTree>
   </p:cSld>
   <p:clrMapOvr>
@@ -3535,248 +4157,184 @@
         <p:nvPr/>
       </p:nvGrpSpPr>
       <p:grpSpPr/>
-      <p:sp>
-        <p:nvSpPr>
-          <p:cNvPr id="2" name="Freeform 1"/>
-          <p:cNvSpPr/>
+      <p:cxnSp>
+        <p:nvCxnSpPr>
+          <p:cNvPr id="2" name="Connector 1"/>
+          <p:cNvCxnSpPr/>
           <p:nvPr/>
-        </p:nvSpPr>
-        <p:spPr>
-          <a:xfrm>
-            <a:off x="0" y="0"/>
-            <a:ext cx="1080000" cy="1080000"/>
-          </a:xfrm>
-          <a:custGeom>
-            <a:avLst/>
-            <a:gdLst/>
-            <a:ahLst/>
-            <a:cxnLst/>
-            <a:rect l="l" t="t" r="r" b="b"/>
-            <a:pathLst>
-              <a:path w="1080000" h="1080000">
-                <a:moveTo>
-                  <a:pt x="0" y="0"/>
-                </a:moveTo>
-                <a:lnTo>
-                  <a:pt x="1080000" y="0"/>
-                </a:lnTo>
-                <a:lnTo>
-                  <a:pt x="1077688" y="70635"/>
-                </a:lnTo>
-                <a:lnTo>
-                  <a:pt x="1070760" y="140968"/>
-                </a:lnTo>
-                <a:lnTo>
-                  <a:pt x="1059248" y="210698"/>
-                </a:lnTo>
-                <a:lnTo>
-                  <a:pt x="1043200" y="279525"/>
-                </a:lnTo>
-                <a:lnTo>
-                  <a:pt x="1022685" y="347155"/>
-                </a:lnTo>
-                <a:lnTo>
-                  <a:pt x="997790" y="413298"/>
-                </a:lnTo>
-                <a:lnTo>
-                  <a:pt x="968623" y="477672"/>
-                </a:lnTo>
-                <a:lnTo>
-                  <a:pt x="935307" y="540000"/>
-                </a:lnTo>
-                <a:lnTo>
-                  <a:pt x="897987" y="600016"/>
-                </a:lnTo>
-                <a:lnTo>
-                  <a:pt x="856822" y="657462"/>
-                </a:lnTo>
-                <a:lnTo>
-                  <a:pt x="811987" y="712093"/>
-                </a:lnTo>
-                <a:lnTo>
-                  <a:pt x="763675" y="763675"/>
-                </a:lnTo>
-                <a:lnTo>
-                  <a:pt x="712093" y="811987"/>
-                </a:lnTo>
-                <a:lnTo>
-                  <a:pt x="657462" y="856822"/>
-                </a:lnTo>
-                <a:lnTo>
-                  <a:pt x="600016" y="897987"/>
-                </a:lnTo>
-                <a:lnTo>
-                  <a:pt x="540000" y="935307"/>
-                </a:lnTo>
-                <a:lnTo>
-                  <a:pt x="477672" y="968623"/>
-                </a:lnTo>
-                <a:lnTo>
-                  <a:pt x="413298" y="997790"/>
-                </a:lnTo>
-                <a:lnTo>
-                  <a:pt x="347155" y="1022685"/>
-                </a:lnTo>
-                <a:lnTo>
-                  <a:pt x="279525" y="1043200"/>
-                </a:lnTo>
-                <a:lnTo>
-                  <a:pt x="210698" y="1059248"/>
-                </a:lnTo>
-                <a:lnTo>
-                  <a:pt x="140968" y="1070760"/>
-                </a:lnTo>
-                <a:lnTo>
-                  <a:pt x="70635" y="1077688"/>
-                </a:lnTo>
-                <a:lnTo>
-                  <a:pt x="0" y="1080000"/>
-                </a:lnTo>
-                <a:close/>
-              </a:path>
-            </a:pathLst>
-          </a:custGeom>
-          <a:solidFill>
-            <a:srgbClr val="E5169B"/>
-          </a:solidFill>
-          <a:ln>
-            <a:noFill/>
+        </p:nvCxnSpPr>
+        <p:spPr>
+          <a:xfrm>
+            <a:off x="79200" y="108000"/>
+            <a:ext cx="57600" cy="0"/>
+          </a:xfrm>
+          <a:prstGeom prst="line">
+            <a:avLst/>
+          </a:prstGeom>
+          <a:ln w="3600">
+            <a:solidFill>
+              <a:srgbClr val="E3E5E9"/>
+            </a:solidFill>
           </a:ln>
         </p:spPr>
-        <p:txBody>
-          <a:bodyPr rtlCol="0" anchor="ctr"/>
-          <a:lstStyle/>
-          <a:p>
-            <a:pPr algn="ctr"/>
-          </a:p>
-        </p:txBody>
-      </p:sp>
-      <p:sp>
-        <p:nvSpPr>
-          <p:cNvPr id="3" name="Freeform 2"/>
-          <p:cNvSpPr/>
+      </p:cxnSp>
+      <p:cxnSp>
+        <p:nvCxnSpPr>
+          <p:cNvPr id="3" name="Connector 2"/>
+          <p:cNvCxnSpPr/>
           <p:nvPr/>
-        </p:nvSpPr>
-        <p:spPr>
-          <a:xfrm>
-            <a:off x="0" y="0"/>
-            <a:ext cx="684000" cy="684000"/>
-          </a:xfrm>
-          <a:custGeom>
-            <a:avLst/>
-            <a:gdLst/>
-            <a:ahLst/>
-            <a:cxnLst/>
-            <a:rect l="l" t="t" r="r" b="b"/>
-            <a:pathLst>
-              <a:path w="684000" h="684000">
-                <a:moveTo>
-                  <a:pt x="0" y="0"/>
-                </a:moveTo>
-                <a:lnTo>
-                  <a:pt x="684000" y="0"/>
-                </a:lnTo>
-                <a:lnTo>
-                  <a:pt x="682536" y="44736"/>
-                </a:lnTo>
-                <a:lnTo>
-                  <a:pt x="678148" y="89280"/>
-                </a:lnTo>
-                <a:lnTo>
-                  <a:pt x="670857" y="133442"/>
-                </a:lnTo>
-                <a:lnTo>
-                  <a:pt x="660693" y="177032"/>
-                </a:lnTo>
-                <a:lnTo>
-                  <a:pt x="647700" y="219865"/>
-                </a:lnTo>
-                <a:lnTo>
-                  <a:pt x="631934" y="261755"/>
-                </a:lnTo>
-                <a:lnTo>
-                  <a:pt x="613461" y="302525"/>
-                </a:lnTo>
-                <a:lnTo>
-                  <a:pt x="592361" y="342000"/>
-                </a:lnTo>
-                <a:lnTo>
-                  <a:pt x="568725" y="380010"/>
-                </a:lnTo>
-                <a:lnTo>
-                  <a:pt x="542654" y="416393"/>
-                </a:lnTo>
-                <a:lnTo>
-                  <a:pt x="514258" y="450993"/>
-                </a:lnTo>
-                <a:lnTo>
-                  <a:pt x="483661" y="483661"/>
-                </a:lnTo>
-                <a:lnTo>
-                  <a:pt x="450993" y="514258"/>
-                </a:lnTo>
-                <a:lnTo>
-                  <a:pt x="416393" y="542654"/>
-                </a:lnTo>
-                <a:lnTo>
-                  <a:pt x="380010" y="568725"/>
-                </a:lnTo>
-                <a:lnTo>
-                  <a:pt x="342000" y="592361"/>
-                </a:lnTo>
-                <a:lnTo>
-                  <a:pt x="302525" y="613461"/>
-                </a:lnTo>
-                <a:lnTo>
-                  <a:pt x="261755" y="631934"/>
-                </a:lnTo>
-                <a:lnTo>
-                  <a:pt x="219865" y="647700"/>
-                </a:lnTo>
-                <a:lnTo>
-                  <a:pt x="177032" y="660693"/>
-                </a:lnTo>
-                <a:lnTo>
-                  <a:pt x="133442" y="670857"/>
-                </a:lnTo>
-                <a:lnTo>
-                  <a:pt x="89280" y="678148"/>
-                </a:lnTo>
-                <a:lnTo>
-                  <a:pt x="44736" y="682536"/>
-                </a:lnTo>
-                <a:lnTo>
-                  <a:pt x="0" y="684000"/>
-                </a:lnTo>
-                <a:close/>
-              </a:path>
-            </a:pathLst>
-          </a:custGeom>
-          <a:solidFill>
-            <a:srgbClr val="FBDEF1"/>
-          </a:solidFill>
-          <a:ln>
-            <a:noFill/>
+        </p:nvCxnSpPr>
+        <p:spPr>
+          <a:xfrm>
+            <a:off x="108000" y="79200"/>
+            <a:ext cx="0" cy="57600"/>
+          </a:xfrm>
+          <a:prstGeom prst="line">
+            <a:avLst/>
+          </a:prstGeom>
+          <a:ln w="3600">
+            <a:solidFill>
+              <a:srgbClr val="E3E5E9"/>
+            </a:solidFill>
           </a:ln>
         </p:spPr>
-        <p:txBody>
-          <a:bodyPr rtlCol="0" anchor="ctr"/>
-          <a:lstStyle/>
-          <a:p>
-            <a:pPr algn="ctr"/>
-          </a:p>
-        </p:txBody>
-      </p:sp>
-      <p:sp>
-        <p:nvSpPr>
-          <p:cNvPr id="4" name="텍스트"/>
+      </p:cxnSp>
+      <p:cxnSp>
+        <p:nvCxnSpPr>
+          <p:cNvPr id="4" name="Connector 3"/>
+          <p:cNvCxnSpPr/>
+          <p:nvPr/>
+        </p:nvCxnSpPr>
+        <p:spPr>
+          <a:xfrm>
+            <a:off x="3103200" y="108000"/>
+            <a:ext cx="57600" cy="0"/>
+          </a:xfrm>
+          <a:prstGeom prst="line">
+            <a:avLst/>
+          </a:prstGeom>
+          <a:ln w="3600">
+            <a:solidFill>
+              <a:srgbClr val="E3E5E9"/>
+            </a:solidFill>
+          </a:ln>
+        </p:spPr>
+      </p:cxnSp>
+      <p:cxnSp>
+        <p:nvCxnSpPr>
+          <p:cNvPr id="5" name="Connector 4"/>
+          <p:cNvCxnSpPr/>
+          <p:nvPr/>
+        </p:nvCxnSpPr>
+        <p:spPr>
+          <a:xfrm>
+            <a:off x="3132000" y="79200"/>
+            <a:ext cx="0" cy="57600"/>
+          </a:xfrm>
+          <a:prstGeom prst="line">
+            <a:avLst/>
+          </a:prstGeom>
+          <a:ln w="3600">
+            <a:solidFill>
+              <a:srgbClr val="E3E5E9"/>
+            </a:solidFill>
+          </a:ln>
+        </p:spPr>
+      </p:cxnSp>
+      <p:cxnSp>
+        <p:nvCxnSpPr>
+          <p:cNvPr id="6" name="Connector 5"/>
+          <p:cNvCxnSpPr/>
+          <p:nvPr/>
+        </p:nvCxnSpPr>
+        <p:spPr>
+          <a:xfrm>
+            <a:off x="79200" y="1692000"/>
+            <a:ext cx="57600" cy="0"/>
+          </a:xfrm>
+          <a:prstGeom prst="line">
+            <a:avLst/>
+          </a:prstGeom>
+          <a:ln w="3600">
+            <a:solidFill>
+              <a:srgbClr val="E3E5E9"/>
+            </a:solidFill>
+          </a:ln>
+        </p:spPr>
+      </p:cxnSp>
+      <p:cxnSp>
+        <p:nvCxnSpPr>
+          <p:cNvPr id="7" name="Connector 6"/>
+          <p:cNvCxnSpPr/>
+          <p:nvPr/>
+        </p:nvCxnSpPr>
+        <p:spPr>
+          <a:xfrm>
+            <a:off x="108000" y="1663200"/>
+            <a:ext cx="0" cy="57600"/>
+          </a:xfrm>
+          <a:prstGeom prst="line">
+            <a:avLst/>
+          </a:prstGeom>
+          <a:ln w="3600">
+            <a:solidFill>
+              <a:srgbClr val="E3E5E9"/>
+            </a:solidFill>
+          </a:ln>
+        </p:spPr>
+      </p:cxnSp>
+      <p:cxnSp>
+        <p:nvCxnSpPr>
+          <p:cNvPr id="8" name="Connector 7"/>
+          <p:cNvCxnSpPr/>
+          <p:nvPr/>
+        </p:nvCxnSpPr>
+        <p:spPr>
+          <a:xfrm>
+            <a:off x="3103200" y="1692000"/>
+            <a:ext cx="57600" cy="0"/>
+          </a:xfrm>
+          <a:prstGeom prst="line">
+            <a:avLst/>
+          </a:prstGeom>
+          <a:ln w="3600">
+            <a:solidFill>
+              <a:srgbClr val="E3E5E9"/>
+            </a:solidFill>
+          </a:ln>
+        </p:spPr>
+      </p:cxnSp>
+      <p:cxnSp>
+        <p:nvCxnSpPr>
+          <p:cNvPr id="9" name="Connector 8"/>
+          <p:cNvCxnSpPr/>
+          <p:nvPr/>
+        </p:nvCxnSpPr>
+        <p:spPr>
+          <a:xfrm>
+            <a:off x="3132000" y="1663200"/>
+            <a:ext cx="0" cy="57600"/>
+          </a:xfrm>
+          <a:prstGeom prst="line">
+            <a:avLst/>
+          </a:prstGeom>
+          <a:ln w="3600">
+            <a:solidFill>
+              <a:srgbClr val="E3E5E9"/>
+            </a:solidFill>
+          </a:ln>
+        </p:spPr>
+      </p:cxnSp>
+      <p:sp>
+        <p:nvSpPr>
+          <p:cNvPr id="10" name="텍스트"/>
           <p:cNvSpPr txBox="1"/>
           <p:nvPr/>
         </p:nvSpPr>
         <p:spPr>
           <a:xfrm>
-            <a:off x="1188000" y="1044000"/>
-            <a:ext cx="1800000" cy="432000"/>
+            <a:off x="252000" y="288000"/>
+            <a:ext cx="2520000" cy="123826"/>
           </a:xfrm>
           <a:prstGeom prst="rect">
             <a:avLst/>
@@ -3789,70 +4347,13 @@
           </a:bodyPr>
           <a:lstStyle/>
           <a:p>
-            <a:pPr algn="r">
-              <a:lnSpc>
-                <a:spcPts val="1739"/>
-              </a:lnSpc>
-            </a:pPr>
-            <a:r>
-              <a:rPr sz="1200" b="1">
-                <a:solidFill>
-                  <a:srgbClr val="12151C"/>
-                </a:solidFill>
-                <a:latin typeface="맑은 고딕"/>
-                <a:ea typeface="맑은 고딕"/>
-              </a:rPr>
-              <a:t>계절마다 새로운</a:t>
-            </a:r>
-          </a:p>
-          <a:p>
-            <a:pPr algn="r">
-              <a:lnSpc>
-                <a:spcPts val="1739"/>
-              </a:lnSpc>
-            </a:pPr>
-            <a:r>
-              <a:rPr sz="1200" b="1">
-                <a:solidFill>
-                  <a:srgbClr val="12151C"/>
-                </a:solidFill>
-                <a:latin typeface="맑은 고딕"/>
-                <a:ea typeface="맑은 고딕"/>
-              </a:rPr>
-              <a:t>향기를 전합니다</a:t>
-            </a:r>
-          </a:p>
-        </p:txBody>
-      </p:sp>
-      <p:sp>
-        <p:nvSpPr>
-          <p:cNvPr id="5" name="텍스트"/>
-          <p:cNvSpPr txBox="1"/>
-          <p:nvPr/>
-        </p:nvSpPr>
-        <p:spPr>
-          <a:xfrm>
-            <a:off x="1188000" y="1526400"/>
-            <a:ext cx="1800000" cy="123826"/>
-          </a:xfrm>
-          <a:prstGeom prst="rect">
-            <a:avLst/>
-          </a:prstGeom>
-          <a:noFill/>
-        </p:spPr>
-        <p:txBody>
-          <a:bodyPr wrap="square" lIns="0" rIns="0" tIns="0" bIns="0" anchor="t">
-            <a:spAutoFit/>
-          </a:bodyPr>
-          <a:lstStyle/>
-          <a:p>
-            <a:pPr algn="r">
+            <a:pPr algn="ctr">
               <a:lnSpc>
                 <a:spcPts val="942"/>
               </a:lnSpc>
             </a:pPr>
             <a:r>
-              <a:rPr sz="650" b="1" spc="200">
+              <a:rPr sz="650" b="1" spc="220">
                 <a:solidFill>
                   <a:srgbClr val="6B7280"/>
                 </a:solidFill>
@@ -3860,6 +4361,237 @@
                 <a:ea typeface="맑은 고딕"/>
               </a:rPr>
               <a:t>상호명</a:t>
+            </a:r>
+          </a:p>
+        </p:txBody>
+      </p:sp>
+      <p:sp>
+        <p:nvSpPr>
+          <p:cNvPr id="11" name="Rectangle 10"/>
+          <p:cNvSpPr/>
+          <p:nvPr/>
+        </p:nvSpPr>
+        <p:spPr>
+          <a:xfrm>
+            <a:off x="1530000" y="453600"/>
+            <a:ext cx="180000" cy="14400"/>
+          </a:xfrm>
+          <a:prstGeom prst="rect">
+            <a:avLst/>
+          </a:prstGeom>
+          <a:solidFill>
+            <a:srgbClr val="E5169B"/>
+          </a:solidFill>
+          <a:ln>
+            <a:noFill/>
+          </a:ln>
+        </p:spPr>
+        <p:txBody>
+          <a:bodyPr rtlCol="0" anchor="ctr"/>
+          <a:lstStyle/>
+          <a:p>
+            <a:pPr algn="ctr"/>
+          </a:p>
+        </p:txBody>
+      </p:sp>
+      <p:sp>
+        <p:nvSpPr>
+          <p:cNvPr id="12" name="텍스트"/>
+          <p:cNvSpPr txBox="1"/>
+          <p:nvPr/>
+        </p:nvSpPr>
+        <p:spPr>
+          <a:xfrm>
+            <a:off x="360000" y="619200"/>
+            <a:ext cx="2520000" cy="99061"/>
+          </a:xfrm>
+          <a:prstGeom prst="rect">
+            <a:avLst/>
+          </a:prstGeom>
+          <a:noFill/>
+        </p:spPr>
+        <p:txBody>
+          <a:bodyPr wrap="square" lIns="0" rIns="0" tIns="0" bIns="0" anchor="t">
+            <a:spAutoFit/>
+          </a:bodyPr>
+          <a:lstStyle/>
+          <a:p>
+            <a:pPr algn="ctr">
+              <a:lnSpc>
+                <a:spcPts val="754"/>
+              </a:lnSpc>
+            </a:pPr>
+            <a:r>
+              <a:rPr sz="520" b="1" spc="240">
+                <a:solidFill>
+                  <a:srgbClr val="6B7280"/>
+                </a:solidFill>
+                <a:latin typeface="맑은 고딕"/>
+                <a:ea typeface="맑은 고딕"/>
+              </a:rPr>
+              <a:t>취급 품목</a:t>
+            </a:r>
+          </a:p>
+        </p:txBody>
+      </p:sp>
+      <p:sp>
+        <p:nvSpPr>
+          <p:cNvPr id="13" name="텍스트"/>
+          <p:cNvSpPr txBox="1"/>
+          <p:nvPr/>
+        </p:nvSpPr>
+        <p:spPr>
+          <a:xfrm>
+            <a:off x="360000" y="741600"/>
+            <a:ext cx="2520000" cy="396000"/>
+          </a:xfrm>
+          <a:prstGeom prst="rect">
+            <a:avLst/>
+          </a:prstGeom>
+          <a:noFill/>
+        </p:spPr>
+        <p:txBody>
+          <a:bodyPr wrap="square" lIns="0" rIns="0" tIns="0" bIns="0" anchor="t">
+            <a:spAutoFit/>
+          </a:bodyPr>
+          <a:lstStyle/>
+          <a:p>
+            <a:pPr algn="ctr">
+              <a:lnSpc>
+                <a:spcPts val="1188"/>
+              </a:lnSpc>
+            </a:pPr>
+            <a:r>
+              <a:rPr sz="819" b="1">
+                <a:solidFill>
+                  <a:srgbClr val="12151C"/>
+                </a:solidFill>
+                <a:latin typeface="맑은 고딕"/>
+                <a:ea typeface="맑은 고딕"/>
+              </a:rPr>
+              <a:t>생화 · 꽃다발  ·  세탁 · 수선  ·  인테리어  ·  가구 제작</a:t>
+            </a:r>
+          </a:p>
+        </p:txBody>
+      </p:sp>
+      <p:cxnSp>
+        <p:nvCxnSpPr>
+          <p:cNvPr id="14" name="Connector 13"/>
+          <p:cNvCxnSpPr/>
+          <p:nvPr/>
+        </p:nvCxnSpPr>
+        <p:spPr>
+          <a:xfrm>
+            <a:off x="360000" y="1224000"/>
+            <a:ext cx="2520000" cy="0"/>
+          </a:xfrm>
+          <a:prstGeom prst="line">
+            <a:avLst/>
+          </a:prstGeom>
+          <a:ln w="3600">
+            <a:solidFill>
+              <a:srgbClr val="E3E5E9"/>
+            </a:solidFill>
+          </a:ln>
+        </p:spPr>
+      </p:cxnSp>
+      <p:sp>
+        <p:nvSpPr>
+          <p:cNvPr id="15" name="텍스트"/>
+          <p:cNvSpPr txBox="1"/>
+          <p:nvPr/>
+        </p:nvSpPr>
+        <p:spPr>
+          <a:xfrm>
+            <a:off x="360000" y="1317600"/>
+            <a:ext cx="1224000" cy="118111"/>
+          </a:xfrm>
+          <a:prstGeom prst="rect">
+            <a:avLst/>
+          </a:prstGeom>
+          <a:noFill/>
+        </p:spPr>
+        <p:txBody>
+          <a:bodyPr wrap="square" lIns="0" rIns="0" tIns="0" bIns="0" anchor="t">
+            <a:spAutoFit/>
+          </a:bodyPr>
+          <a:lstStyle/>
+          <a:p>
+            <a:pPr algn="ctr">
+              <a:lnSpc>
+                <a:spcPts val="899"/>
+              </a:lnSpc>
+            </a:pPr>
+            <a:r>
+              <a:rPr sz="620" b="0">
+                <a:solidFill>
+                  <a:srgbClr val="12151C"/>
+                </a:solidFill>
+                <a:latin typeface="맑은 고딕"/>
+                <a:ea typeface="맑은 고딕"/>
+              </a:rPr>
+              <a:t>월–토 09:00 – 18:00</a:t>
+            </a:r>
+          </a:p>
+        </p:txBody>
+      </p:sp>
+      <p:cxnSp>
+        <p:nvCxnSpPr>
+          <p:cNvPr id="16" name="Connector 15"/>
+          <p:cNvCxnSpPr/>
+          <p:nvPr/>
+        </p:nvCxnSpPr>
+        <p:spPr>
+          <a:xfrm>
+            <a:off x="1620000" y="1296000"/>
+            <a:ext cx="0" cy="180000"/>
+          </a:xfrm>
+          <a:prstGeom prst="line">
+            <a:avLst/>
+          </a:prstGeom>
+          <a:ln w="3600">
+            <a:solidFill>
+              <a:srgbClr val="E3E5E9"/>
+            </a:solidFill>
+          </a:ln>
+        </p:spPr>
+      </p:cxnSp>
+      <p:sp>
+        <p:nvSpPr>
+          <p:cNvPr id="17" name="텍스트"/>
+          <p:cNvSpPr txBox="1"/>
+          <p:nvPr/>
+        </p:nvSpPr>
+        <p:spPr>
+          <a:xfrm>
+            <a:off x="1656000" y="1317600"/>
+            <a:ext cx="1224000" cy="118111"/>
+          </a:xfrm>
+          <a:prstGeom prst="rect">
+            <a:avLst/>
+          </a:prstGeom>
+          <a:noFill/>
+        </p:spPr>
+        <p:txBody>
+          <a:bodyPr wrap="square" lIns="0" rIns="0" tIns="0" bIns="0" anchor="t">
+            <a:spAutoFit/>
+          </a:bodyPr>
+          <a:lstStyle/>
+          <a:p>
+            <a:pPr algn="ctr">
+              <a:lnSpc>
+                <a:spcPts val="899"/>
+              </a:lnSpc>
+            </a:pPr>
+            <a:r>
+              <a:rPr sz="620" b="0">
+                <a:solidFill>
+                  <a:srgbClr val="12151C"/>
+                </a:solidFill>
+                <a:latin typeface="맑은 고딕"/>
+                <a:ea typeface="맑은 고딕"/>
+              </a:rPr>
+              <a:t>www.example.com</a:t>
             </a:r>
           </a:p>
         </p:txBody>
